--- a/test/c_c_up.pptx
+++ b/test/c_c_up.pptx
@@ -3097,7 +3097,7 @@
         <p:spPr>
           <a:xfrm>
             <a:off x="0" y="0"/>
-            <a:ext cx="6858000" cy="3516266"/>
+            <a:ext cx="6858000" cy="1611622"/>
           </a:xfrm>
           <a:custGeom>
             <a:avLst/>
@@ -3106,387 +3106,1062 @@
             <a:cxnLst/>
             <a:rect l="l" t="t" r="r" b="b"/>
             <a:pathLst>
-              <a:path w="6858000" h="3516266">
+              <a:path w="6858000" h="1611622">
                 <a:moveTo>
-                  <a:pt x="0" y="2078105"/>
+                  <a:pt x="0" y="952464"/>
                 </a:moveTo>
                 <a:lnTo>
-                  <a:pt x="6336" y="1915941"/>
-                </a:lnTo>
-                <a:lnTo>
-                  <a:pt x="25307" y="1754765"/>
-                </a:lnTo>
-                <a:lnTo>
-                  <a:pt x="56798" y="1595562"/>
-                </a:lnTo>
-                <a:lnTo>
-                  <a:pt x="100615" y="1439301"/>
-                </a:lnTo>
-                <a:lnTo>
-                  <a:pt x="156492" y="1286936"/>
-                </a:lnTo>
-                <a:lnTo>
-                  <a:pt x="224087" y="1139396"/>
-                </a:lnTo>
-                <a:lnTo>
-                  <a:pt x="302990" y="997580"/>
-                </a:lnTo>
-                <a:lnTo>
-                  <a:pt x="392718" y="862353"/>
-                </a:lnTo>
-                <a:lnTo>
-                  <a:pt x="492724" y="734540"/>
-                </a:lnTo>
-                <a:lnTo>
-                  <a:pt x="602399" y="614921"/>
-                </a:lnTo>
-                <a:lnTo>
-                  <a:pt x="721074" y="504225"/>
-                </a:lnTo>
-                <a:lnTo>
-                  <a:pt x="848025" y="403126"/>
-                </a:lnTo>
-                <a:lnTo>
-                  <a:pt x="982477" y="312242"/>
-                </a:lnTo>
-                <a:lnTo>
-                  <a:pt x="1123612" y="232127"/>
-                </a:lnTo>
-                <a:lnTo>
-                  <a:pt x="1270567" y="163268"/>
-                </a:lnTo>
-                <a:lnTo>
-                  <a:pt x="1422448" y="106087"/>
-                </a:lnTo>
-                <a:lnTo>
-                  <a:pt x="1578327" y="60932"/>
-                </a:lnTo>
-                <a:lnTo>
-                  <a:pt x="1737255" y="28078"/>
-                </a:lnTo>
-                <a:lnTo>
-                  <a:pt x="1898261" y="7726"/>
-                </a:lnTo>
-                <a:lnTo>
-                  <a:pt x="2060365" y="0"/>
-                </a:lnTo>
-                <a:lnTo>
-                  <a:pt x="2222578" y="4946"/>
-                </a:lnTo>
-                <a:lnTo>
-                  <a:pt x="2383910" y="22535"/>
-                </a:lnTo>
-                <a:lnTo>
-                  <a:pt x="2543377" y="52659"/>
-                </a:lnTo>
-                <a:lnTo>
-                  <a:pt x="2700008" y="95135"/>
-                </a:lnTo>
-                <a:lnTo>
-                  <a:pt x="2852847" y="149703"/>
-                </a:lnTo>
-                <a:lnTo>
-                  <a:pt x="3000961" y="216032"/>
-                </a:lnTo>
-                <a:lnTo>
-                  <a:pt x="3143449" y="293716"/>
-                </a:lnTo>
-                <a:lnTo>
-                  <a:pt x="3279439" y="382281"/>
-                </a:lnTo>
-                <a:lnTo>
-                  <a:pt x="3408105" y="481188"/>
-                </a:lnTo>
-                <a:lnTo>
-                  <a:pt x="3528660" y="589834"/>
-                </a:lnTo>
-                <a:lnTo>
-                  <a:pt x="3640370" y="707555"/>
-                </a:lnTo>
-                <a:lnTo>
-                  <a:pt x="3742553" y="833634"/>
-                </a:lnTo>
-                <a:lnTo>
-                  <a:pt x="3834586" y="967303"/>
-                </a:lnTo>
-                <a:lnTo>
-                  <a:pt x="3915908" y="1107745"/>
-                </a:lnTo>
-                <a:lnTo>
-                  <a:pt x="3986024" y="1254105"/>
-                </a:lnTo>
-                <a:lnTo>
-                  <a:pt x="4044505" y="1405490"/>
-                </a:lnTo>
-                <a:lnTo>
-                  <a:pt x="4090995" y="1560976"/>
-                </a:lnTo>
-                <a:lnTo>
-                  <a:pt x="4125210" y="1719616"/>
-                </a:lnTo>
-                <a:lnTo>
-                  <a:pt x="4146942" y="1880443"/>
-                </a:lnTo>
-                <a:lnTo>
-                  <a:pt x="4156058" y="2042474"/>
-                </a:lnTo>
-                <a:lnTo>
-                  <a:pt x="4152502" y="2204723"/>
-                </a:lnTo>
-                <a:lnTo>
-                  <a:pt x="4136297" y="2366200"/>
-                </a:lnTo>
-                <a:lnTo>
-                  <a:pt x="4107541" y="2525920"/>
-                </a:lnTo>
-                <a:lnTo>
-                  <a:pt x="4066410" y="2682909"/>
-                </a:lnTo>
-                <a:lnTo>
-                  <a:pt x="4013153" y="2836210"/>
-                </a:lnTo>
-                <a:lnTo>
-                  <a:pt x="3948097" y="2984888"/>
-                </a:lnTo>
-                <a:lnTo>
-                  <a:pt x="3871637" y="3128036"/>
-                </a:lnTo>
-                <a:lnTo>
-                  <a:pt x="3784241" y="3264781"/>
-                </a:lnTo>
-                <a:lnTo>
-                  <a:pt x="3686441" y="3394289"/>
-                </a:lnTo>
-                <a:lnTo>
-                  <a:pt x="3686441" y="3394289"/>
-                </a:lnTo>
-                <a:lnTo>
-                  <a:pt x="3670218" y="3412685"/>
-                </a:lnTo>
-                <a:lnTo>
-                  <a:pt x="3652684" y="3429835"/>
-                </a:lnTo>
-                <a:lnTo>
-                  <a:pt x="3633934" y="3445646"/>
-                </a:lnTo>
-                <a:lnTo>
-                  <a:pt x="3614070" y="3460033"/>
-                </a:lnTo>
-                <a:lnTo>
-                  <a:pt x="3593200" y="3472917"/>
-                </a:lnTo>
-                <a:lnTo>
-                  <a:pt x="3571437" y="3484229"/>
-                </a:lnTo>
-                <a:lnTo>
-                  <a:pt x="3548901" y="3493906"/>
-                </a:lnTo>
-                <a:lnTo>
-                  <a:pt x="3525712" y="3501897"/>
-                </a:lnTo>
-                <a:lnTo>
-                  <a:pt x="3501998" y="3508158"/>
-                </a:lnTo>
-                <a:lnTo>
-                  <a:pt x="3477886" y="3512654"/>
-                </a:lnTo>
-                <a:lnTo>
-                  <a:pt x="3453510" y="3515362"/>
-                </a:lnTo>
-                <a:lnTo>
-                  <a:pt x="3429000" y="3516266"/>
-                </a:lnTo>
-                <a:lnTo>
-                  <a:pt x="3404489" y="3515362"/>
-                </a:lnTo>
-                <a:lnTo>
-                  <a:pt x="3380113" y="3512654"/>
-                </a:lnTo>
-                <a:lnTo>
-                  <a:pt x="3356001" y="3508158"/>
-                </a:lnTo>
-                <a:lnTo>
-                  <a:pt x="3332287" y="3501897"/>
-                </a:lnTo>
-                <a:lnTo>
-                  <a:pt x="3309098" y="3493906"/>
-                </a:lnTo>
-                <a:lnTo>
-                  <a:pt x="3286562" y="3484229"/>
-                </a:lnTo>
-                <a:lnTo>
-                  <a:pt x="3264799" y="3472917"/>
-                </a:lnTo>
-                <a:lnTo>
-                  <a:pt x="3243929" y="3460033"/>
-                </a:lnTo>
-                <a:lnTo>
-                  <a:pt x="3224065" y="3445646"/>
-                </a:lnTo>
-                <a:lnTo>
-                  <a:pt x="3205315" y="3429835"/>
-                </a:lnTo>
-                <a:lnTo>
-                  <a:pt x="3187781" y="3412685"/>
-                </a:lnTo>
-                <a:lnTo>
-                  <a:pt x="3171558" y="3394289"/>
-                </a:lnTo>
-                <a:lnTo>
-                  <a:pt x="3171558" y="3394289"/>
-                </a:lnTo>
-                <a:lnTo>
-                  <a:pt x="3073758" y="3264781"/>
-                </a:lnTo>
-                <a:lnTo>
-                  <a:pt x="2986362" y="3128036"/>
-                </a:lnTo>
-                <a:lnTo>
-                  <a:pt x="2909902" y="2984888"/>
-                </a:lnTo>
-                <a:lnTo>
-                  <a:pt x="2844846" y="2836210"/>
-                </a:lnTo>
-                <a:lnTo>
-                  <a:pt x="2791589" y="2682909"/>
-                </a:lnTo>
-                <a:lnTo>
-                  <a:pt x="2750458" y="2525920"/>
-                </a:lnTo>
-                <a:lnTo>
-                  <a:pt x="2721702" y="2366200"/>
-                </a:lnTo>
-                <a:lnTo>
-                  <a:pt x="2705497" y="2204723"/>
-                </a:lnTo>
-                <a:lnTo>
-                  <a:pt x="2701941" y="2042474"/>
-                </a:lnTo>
-                <a:lnTo>
-                  <a:pt x="2711057" y="1880443"/>
-                </a:lnTo>
-                <a:lnTo>
-                  <a:pt x="2732789" y="1719616"/>
-                </a:lnTo>
-                <a:lnTo>
-                  <a:pt x="2767004" y="1560976"/>
-                </a:lnTo>
-                <a:lnTo>
-                  <a:pt x="2813494" y="1405490"/>
-                </a:lnTo>
-                <a:lnTo>
-                  <a:pt x="2871975" y="1254105"/>
-                </a:lnTo>
-                <a:lnTo>
-                  <a:pt x="2942091" y="1107745"/>
-                </a:lnTo>
-                <a:lnTo>
-                  <a:pt x="3023413" y="967303"/>
-                </a:lnTo>
-                <a:lnTo>
-                  <a:pt x="3115446" y="833634"/>
-                </a:lnTo>
-                <a:lnTo>
-                  <a:pt x="3217629" y="707555"/>
-                </a:lnTo>
-                <a:lnTo>
-                  <a:pt x="3329339" y="589834"/>
-                </a:lnTo>
-                <a:lnTo>
-                  <a:pt x="3449894" y="481188"/>
-                </a:lnTo>
-                <a:lnTo>
-                  <a:pt x="3578560" y="382281"/>
-                </a:lnTo>
-                <a:lnTo>
-                  <a:pt x="3714550" y="293716"/>
-                </a:lnTo>
-                <a:lnTo>
-                  <a:pt x="3857038" y="216032"/>
-                </a:lnTo>
-                <a:lnTo>
-                  <a:pt x="4005152" y="149703"/>
-                </a:lnTo>
-                <a:lnTo>
-                  <a:pt x="4157991" y="95135"/>
-                </a:lnTo>
-                <a:lnTo>
-                  <a:pt x="4314622" y="52659"/>
-                </a:lnTo>
-                <a:lnTo>
-                  <a:pt x="4474089" y="22535"/>
-                </a:lnTo>
-                <a:lnTo>
-                  <a:pt x="4635421" y="4946"/>
-                </a:lnTo>
-                <a:lnTo>
-                  <a:pt x="4797634" y="0"/>
-                </a:lnTo>
-                <a:lnTo>
-                  <a:pt x="4959738" y="7726"/>
-                </a:lnTo>
-                <a:lnTo>
-                  <a:pt x="5120744" y="28078"/>
-                </a:lnTo>
-                <a:lnTo>
-                  <a:pt x="5279672" y="60932"/>
-                </a:lnTo>
-                <a:lnTo>
-                  <a:pt x="5435551" y="106087"/>
-                </a:lnTo>
-                <a:lnTo>
-                  <a:pt x="5587432" y="163268"/>
-                </a:lnTo>
-                <a:lnTo>
-                  <a:pt x="5734387" y="232127"/>
-                </a:lnTo>
-                <a:lnTo>
-                  <a:pt x="5875522" y="312242"/>
-                </a:lnTo>
-                <a:lnTo>
-                  <a:pt x="6009974" y="403126"/>
-                </a:lnTo>
-                <a:lnTo>
-                  <a:pt x="6136925" y="504225"/>
-                </a:lnTo>
-                <a:lnTo>
-                  <a:pt x="6255600" y="614921"/>
-                </a:lnTo>
-                <a:lnTo>
-                  <a:pt x="6365275" y="734540"/>
-                </a:lnTo>
-                <a:lnTo>
-                  <a:pt x="6465281" y="862353"/>
-                </a:lnTo>
-                <a:lnTo>
-                  <a:pt x="6555009" y="997580"/>
-                </a:lnTo>
-                <a:lnTo>
-                  <a:pt x="6633912" y="1139396"/>
-                </a:lnTo>
-                <a:lnTo>
-                  <a:pt x="6701507" y="1286936"/>
-                </a:lnTo>
-                <a:lnTo>
-                  <a:pt x="6757384" y="1439301"/>
-                </a:lnTo>
-                <a:lnTo>
-                  <a:pt x="6801201" y="1595562"/>
-                </a:lnTo>
-                <a:lnTo>
-                  <a:pt x="6832692" y="1754765"/>
-                </a:lnTo>
-                <a:lnTo>
-                  <a:pt x="6851663" y="1915941"/>
-                </a:lnTo>
-                <a:lnTo>
-                  <a:pt x="6858000" y="2078105"/>
+                  <a:pt x="2904" y="878139"/>
+                </a:lnTo>
+                <a:lnTo>
+                  <a:pt x="11599" y="804267"/>
+                </a:lnTo>
+                <a:lnTo>
+                  <a:pt x="26032" y="731299"/>
+                </a:lnTo>
+                <a:lnTo>
+                  <a:pt x="46115" y="659679"/>
+                </a:lnTo>
+                <a:lnTo>
+                  <a:pt x="71725" y="589845"/>
+                </a:lnTo>
+                <a:lnTo>
+                  <a:pt x="102706" y="522223"/>
+                </a:lnTo>
+                <a:lnTo>
+                  <a:pt x="138870" y="457224"/>
+                </a:lnTo>
+                <a:lnTo>
+                  <a:pt x="179995" y="395245"/>
+                </a:lnTo>
+                <a:lnTo>
+                  <a:pt x="225832" y="336664"/>
+                </a:lnTo>
+                <a:lnTo>
+                  <a:pt x="276099" y="281838"/>
+                </a:lnTo>
+                <a:lnTo>
+                  <a:pt x="330492" y="231103"/>
+                </a:lnTo>
+                <a:lnTo>
+                  <a:pt x="388678" y="184766"/>
+                </a:lnTo>
+                <a:lnTo>
+                  <a:pt x="450302" y="143111"/>
+                </a:lnTo>
+                <a:lnTo>
+                  <a:pt x="514988" y="106391"/>
+                </a:lnTo>
+                <a:lnTo>
+                  <a:pt x="582343" y="74831"/>
+                </a:lnTo>
+                <a:lnTo>
+                  <a:pt x="651955" y="48623"/>
+                </a:lnTo>
+                <a:lnTo>
+                  <a:pt x="723400" y="27927"/>
+                </a:lnTo>
+                <a:lnTo>
+                  <a:pt x="796241" y="12869"/>
+                </a:lnTo>
+                <a:lnTo>
+                  <a:pt x="870036" y="3541"/>
+                </a:lnTo>
+                <a:lnTo>
+                  <a:pt x="944334" y="0"/>
+                </a:lnTo>
+                <a:lnTo>
+                  <a:pt x="1018681" y="2267"/>
+                </a:lnTo>
+                <a:lnTo>
+                  <a:pt x="1092625" y="10328"/>
+                </a:lnTo>
+                <a:lnTo>
+                  <a:pt x="1165714" y="24135"/>
+                </a:lnTo>
+                <a:lnTo>
+                  <a:pt x="1237503" y="43603"/>
+                </a:lnTo>
+                <a:lnTo>
+                  <a:pt x="1307555" y="68614"/>
+                </a:lnTo>
+                <a:lnTo>
+                  <a:pt x="1375440" y="99014"/>
+                </a:lnTo>
+                <a:lnTo>
+                  <a:pt x="1440747" y="134619"/>
+                </a:lnTo>
+                <a:lnTo>
+                  <a:pt x="1503076" y="175212"/>
+                </a:lnTo>
+                <a:lnTo>
+                  <a:pt x="1562048" y="220544"/>
+                </a:lnTo>
+                <a:lnTo>
+                  <a:pt x="1617302" y="270340"/>
+                </a:lnTo>
+                <a:lnTo>
+                  <a:pt x="1668502" y="324296"/>
+                </a:lnTo>
+                <a:lnTo>
+                  <a:pt x="1715336" y="382082"/>
+                </a:lnTo>
+                <a:lnTo>
+                  <a:pt x="1757518" y="443347"/>
+                </a:lnTo>
+                <a:lnTo>
+                  <a:pt x="1794791" y="507716"/>
+                </a:lnTo>
+                <a:lnTo>
+                  <a:pt x="1826927" y="574798"/>
+                </a:lnTo>
+                <a:lnTo>
+                  <a:pt x="1853731" y="644182"/>
+                </a:lnTo>
+                <a:lnTo>
+                  <a:pt x="1875039" y="715447"/>
+                </a:lnTo>
+                <a:lnTo>
+                  <a:pt x="1890721" y="788157"/>
+                </a:lnTo>
+                <a:lnTo>
+                  <a:pt x="1900681" y="861869"/>
+                </a:lnTo>
+                <a:lnTo>
+                  <a:pt x="1904859" y="936134"/>
+                </a:lnTo>
+                <a:lnTo>
+                  <a:pt x="1903230" y="1010498"/>
+                </a:lnTo>
+                <a:lnTo>
+                  <a:pt x="1895803" y="1084508"/>
+                </a:lnTo>
+                <a:lnTo>
+                  <a:pt x="1882623" y="1157713"/>
+                </a:lnTo>
+                <a:lnTo>
+                  <a:pt x="1863771" y="1229666"/>
+                </a:lnTo>
+                <a:lnTo>
+                  <a:pt x="1839362" y="1299929"/>
+                </a:lnTo>
+                <a:lnTo>
+                  <a:pt x="1809544" y="1368073"/>
+                </a:lnTo>
+                <a:lnTo>
+                  <a:pt x="1774500" y="1433683"/>
+                </a:lnTo>
+                <a:lnTo>
+                  <a:pt x="1734444" y="1496358"/>
+                </a:lnTo>
+                <a:lnTo>
+                  <a:pt x="1689618" y="1555716"/>
+                </a:lnTo>
+                <a:lnTo>
+                  <a:pt x="1689618" y="1555716"/>
+                </a:lnTo>
+                <a:lnTo>
+                  <a:pt x="1682183" y="1564147"/>
+                </a:lnTo>
+                <a:lnTo>
+                  <a:pt x="1674146" y="1572007"/>
+                </a:lnTo>
+                <a:lnTo>
+                  <a:pt x="1665553" y="1579254"/>
+                </a:lnTo>
+                <a:lnTo>
+                  <a:pt x="1656448" y="1585848"/>
+                </a:lnTo>
+                <a:lnTo>
+                  <a:pt x="1646883" y="1591754"/>
+                </a:lnTo>
+                <a:lnTo>
+                  <a:pt x="1636909" y="1596938"/>
+                </a:lnTo>
+                <a:lnTo>
+                  <a:pt x="1626579" y="1601374"/>
+                </a:lnTo>
+                <a:lnTo>
+                  <a:pt x="1615951" y="1605036"/>
+                </a:lnTo>
+                <a:lnTo>
+                  <a:pt x="1605082" y="1607905"/>
+                </a:lnTo>
+                <a:lnTo>
+                  <a:pt x="1594031" y="1609966"/>
+                </a:lnTo>
+                <a:lnTo>
+                  <a:pt x="1582858" y="1611207"/>
+                </a:lnTo>
+                <a:lnTo>
+                  <a:pt x="1571625" y="1611622"/>
+                </a:lnTo>
+                <a:lnTo>
+                  <a:pt x="1560391" y="1611207"/>
+                </a:lnTo>
+                <a:lnTo>
+                  <a:pt x="1549218" y="1609966"/>
+                </a:lnTo>
+                <a:lnTo>
+                  <a:pt x="1538167" y="1607905"/>
+                </a:lnTo>
+                <a:lnTo>
+                  <a:pt x="1527298" y="1605036"/>
+                </a:lnTo>
+                <a:lnTo>
+                  <a:pt x="1516670" y="1601374"/>
+                </a:lnTo>
+                <a:lnTo>
+                  <a:pt x="1506340" y="1596938"/>
+                </a:lnTo>
+                <a:lnTo>
+                  <a:pt x="1496366" y="1591754"/>
+                </a:lnTo>
+                <a:lnTo>
+                  <a:pt x="1486801" y="1585848"/>
+                </a:lnTo>
+                <a:lnTo>
+                  <a:pt x="1477696" y="1579254"/>
+                </a:lnTo>
+                <a:lnTo>
+                  <a:pt x="1469103" y="1572007"/>
+                </a:lnTo>
+                <a:lnTo>
+                  <a:pt x="1461066" y="1564147"/>
+                </a:lnTo>
+                <a:lnTo>
+                  <a:pt x="1453631" y="1555716"/>
+                </a:lnTo>
+                <a:lnTo>
+                  <a:pt x="1453631" y="1555716"/>
+                </a:lnTo>
+                <a:lnTo>
+                  <a:pt x="1401269" y="1485360"/>
+                </a:lnTo>
+                <a:lnTo>
+                  <a:pt x="1355601" y="1410486"/>
+                </a:lnTo>
+                <a:lnTo>
+                  <a:pt x="1317014" y="1331729"/>
+                </a:lnTo>
+                <a:lnTo>
+                  <a:pt x="1285833" y="1249757"/>
+                </a:lnTo>
+                <a:lnTo>
+                  <a:pt x="1262325" y="1165264"/>
+                </a:lnTo>
+                <a:lnTo>
+                  <a:pt x="1246687" y="1078968"/>
+                </a:lnTo>
+                <a:lnTo>
+                  <a:pt x="1239054" y="991599"/>
+                </a:lnTo>
+                <a:lnTo>
+                  <a:pt x="1239488" y="903898"/>
+                </a:lnTo>
+                <a:lnTo>
+                  <a:pt x="1247988" y="816608"/>
+                </a:lnTo>
+                <a:lnTo>
+                  <a:pt x="1264480" y="730471"/>
+                </a:lnTo>
+                <a:lnTo>
+                  <a:pt x="1288825" y="646216"/>
+                </a:lnTo>
+                <a:lnTo>
+                  <a:pt x="1320816" y="564556"/>
+                </a:lnTo>
+                <a:lnTo>
+                  <a:pt x="1360183" y="486186"/>
+                </a:lnTo>
+                <a:lnTo>
+                  <a:pt x="1406591" y="411769"/>
+                </a:lnTo>
+                <a:lnTo>
+                  <a:pt x="1459647" y="341935"/>
+                </a:lnTo>
+                <a:lnTo>
+                  <a:pt x="1518902" y="277278"/>
+                </a:lnTo>
+                <a:lnTo>
+                  <a:pt x="1583852" y="218345"/>
+                </a:lnTo>
+                <a:lnTo>
+                  <a:pt x="1653947" y="165636"/>
+                </a:lnTo>
+                <a:lnTo>
+                  <a:pt x="1728594" y="119597"/>
+                </a:lnTo>
+                <a:lnTo>
+                  <a:pt x="1807158" y="80619"/>
+                </a:lnTo>
+                <a:lnTo>
+                  <a:pt x="1888975" y="49033"/>
+                </a:lnTo>
+                <a:lnTo>
+                  <a:pt x="1973350" y="25106"/>
+                </a:lnTo>
+                <a:lnTo>
+                  <a:pt x="2059568" y="9041"/>
+                </a:lnTo>
+                <a:lnTo>
+                  <a:pt x="2146898" y="974"/>
+                </a:lnTo>
+                <a:lnTo>
+                  <a:pt x="2234601" y="974"/>
+                </a:lnTo>
+                <a:lnTo>
+                  <a:pt x="2321931" y="9041"/>
+                </a:lnTo>
+                <a:lnTo>
+                  <a:pt x="2408149" y="25106"/>
+                </a:lnTo>
+                <a:lnTo>
+                  <a:pt x="2492524" y="49033"/>
+                </a:lnTo>
+                <a:lnTo>
+                  <a:pt x="2574341" y="80619"/>
+                </a:lnTo>
+                <a:lnTo>
+                  <a:pt x="2652905" y="119597"/>
+                </a:lnTo>
+                <a:lnTo>
+                  <a:pt x="2727552" y="165636"/>
+                </a:lnTo>
+                <a:lnTo>
+                  <a:pt x="2797647" y="218345"/>
+                </a:lnTo>
+                <a:lnTo>
+                  <a:pt x="2862597" y="277278"/>
+                </a:lnTo>
+                <a:lnTo>
+                  <a:pt x="2921852" y="341935"/>
+                </a:lnTo>
+                <a:lnTo>
+                  <a:pt x="2974908" y="411769"/>
+                </a:lnTo>
+                <a:lnTo>
+                  <a:pt x="3021316" y="486186"/>
+                </a:lnTo>
+                <a:lnTo>
+                  <a:pt x="3060683" y="564556"/>
+                </a:lnTo>
+                <a:lnTo>
+                  <a:pt x="3092674" y="646216"/>
+                </a:lnTo>
+                <a:lnTo>
+                  <a:pt x="3117019" y="730471"/>
+                </a:lnTo>
+                <a:lnTo>
+                  <a:pt x="3133511" y="816608"/>
+                </a:lnTo>
+                <a:lnTo>
+                  <a:pt x="3142011" y="903898"/>
+                </a:lnTo>
+                <a:lnTo>
+                  <a:pt x="3142445" y="991599"/>
+                </a:lnTo>
+                <a:lnTo>
+                  <a:pt x="3134812" y="1078968"/>
+                </a:lnTo>
+                <a:lnTo>
+                  <a:pt x="3119174" y="1165264"/>
+                </a:lnTo>
+                <a:lnTo>
+                  <a:pt x="3095666" y="1249757"/>
+                </a:lnTo>
+                <a:lnTo>
+                  <a:pt x="3064485" y="1331729"/>
+                </a:lnTo>
+                <a:lnTo>
+                  <a:pt x="3025898" y="1410486"/>
+                </a:lnTo>
+                <a:lnTo>
+                  <a:pt x="2980230" y="1485360"/>
+                </a:lnTo>
+                <a:lnTo>
+                  <a:pt x="2927868" y="1555716"/>
+                </a:lnTo>
+                <a:lnTo>
+                  <a:pt x="2927868" y="1555716"/>
+                </a:lnTo>
+                <a:lnTo>
+                  <a:pt x="2920433" y="1564147"/>
+                </a:lnTo>
+                <a:lnTo>
+                  <a:pt x="2912396" y="1572007"/>
+                </a:lnTo>
+                <a:lnTo>
+                  <a:pt x="2903803" y="1579254"/>
+                </a:lnTo>
+                <a:lnTo>
+                  <a:pt x="2894698" y="1585848"/>
+                </a:lnTo>
+                <a:lnTo>
+                  <a:pt x="2885133" y="1591754"/>
+                </a:lnTo>
+                <a:lnTo>
+                  <a:pt x="2875159" y="1596938"/>
+                </a:lnTo>
+                <a:lnTo>
+                  <a:pt x="2864829" y="1601374"/>
+                </a:lnTo>
+                <a:lnTo>
+                  <a:pt x="2854201" y="1605036"/>
+                </a:lnTo>
+                <a:lnTo>
+                  <a:pt x="2843332" y="1607905"/>
+                </a:lnTo>
+                <a:lnTo>
+                  <a:pt x="2832281" y="1609966"/>
+                </a:lnTo>
+                <a:lnTo>
+                  <a:pt x="2821108" y="1611207"/>
+                </a:lnTo>
+                <a:lnTo>
+                  <a:pt x="2809875" y="1611622"/>
+                </a:lnTo>
+                <a:lnTo>
+                  <a:pt x="2798641" y="1611207"/>
+                </a:lnTo>
+                <a:lnTo>
+                  <a:pt x="2787468" y="1609966"/>
+                </a:lnTo>
+                <a:lnTo>
+                  <a:pt x="2776417" y="1607905"/>
+                </a:lnTo>
+                <a:lnTo>
+                  <a:pt x="2765548" y="1605036"/>
+                </a:lnTo>
+                <a:lnTo>
+                  <a:pt x="2754920" y="1601374"/>
+                </a:lnTo>
+                <a:lnTo>
+                  <a:pt x="2744590" y="1596938"/>
+                </a:lnTo>
+                <a:lnTo>
+                  <a:pt x="2734616" y="1591754"/>
+                </a:lnTo>
+                <a:lnTo>
+                  <a:pt x="2725051" y="1585848"/>
+                </a:lnTo>
+                <a:lnTo>
+                  <a:pt x="2715946" y="1579254"/>
+                </a:lnTo>
+                <a:lnTo>
+                  <a:pt x="2707353" y="1572007"/>
+                </a:lnTo>
+                <a:lnTo>
+                  <a:pt x="2699316" y="1564147"/>
+                </a:lnTo>
+                <a:lnTo>
+                  <a:pt x="2691881" y="1555716"/>
+                </a:lnTo>
+                <a:lnTo>
+                  <a:pt x="2691881" y="1555716"/>
+                </a:lnTo>
+                <a:lnTo>
+                  <a:pt x="2639519" y="1485360"/>
+                </a:lnTo>
+                <a:lnTo>
+                  <a:pt x="2593851" y="1410486"/>
+                </a:lnTo>
+                <a:lnTo>
+                  <a:pt x="2555264" y="1331729"/>
+                </a:lnTo>
+                <a:lnTo>
+                  <a:pt x="2524083" y="1249757"/>
+                </a:lnTo>
+                <a:lnTo>
+                  <a:pt x="2500575" y="1165264"/>
+                </a:lnTo>
+                <a:lnTo>
+                  <a:pt x="2484937" y="1078968"/>
+                </a:lnTo>
+                <a:lnTo>
+                  <a:pt x="2477304" y="991599"/>
+                </a:lnTo>
+                <a:lnTo>
+                  <a:pt x="2477738" y="903898"/>
+                </a:lnTo>
+                <a:lnTo>
+                  <a:pt x="2486238" y="816608"/>
+                </a:lnTo>
+                <a:lnTo>
+                  <a:pt x="2502730" y="730471"/>
+                </a:lnTo>
+                <a:lnTo>
+                  <a:pt x="2527075" y="646216"/>
+                </a:lnTo>
+                <a:lnTo>
+                  <a:pt x="2559066" y="564556"/>
+                </a:lnTo>
+                <a:lnTo>
+                  <a:pt x="2598433" y="486186"/>
+                </a:lnTo>
+                <a:lnTo>
+                  <a:pt x="2644841" y="411769"/>
+                </a:lnTo>
+                <a:lnTo>
+                  <a:pt x="2697897" y="341935"/>
+                </a:lnTo>
+                <a:lnTo>
+                  <a:pt x="2757152" y="277278"/>
+                </a:lnTo>
+                <a:lnTo>
+                  <a:pt x="2822102" y="218345"/>
+                </a:lnTo>
+                <a:lnTo>
+                  <a:pt x="2892197" y="165636"/>
+                </a:lnTo>
+                <a:lnTo>
+                  <a:pt x="2966844" y="119597"/>
+                </a:lnTo>
+                <a:lnTo>
+                  <a:pt x="3045408" y="80619"/>
+                </a:lnTo>
+                <a:lnTo>
+                  <a:pt x="3127225" y="49033"/>
+                </a:lnTo>
+                <a:lnTo>
+                  <a:pt x="3211600" y="25106"/>
+                </a:lnTo>
+                <a:lnTo>
+                  <a:pt x="3297818" y="9041"/>
+                </a:lnTo>
+                <a:lnTo>
+                  <a:pt x="3385148" y="974"/>
+                </a:lnTo>
+                <a:lnTo>
+                  <a:pt x="3472851" y="974"/>
+                </a:lnTo>
+                <a:lnTo>
+                  <a:pt x="3560181" y="9041"/>
+                </a:lnTo>
+                <a:lnTo>
+                  <a:pt x="3646399" y="25106"/>
+                </a:lnTo>
+                <a:lnTo>
+                  <a:pt x="3730774" y="49033"/>
+                </a:lnTo>
+                <a:lnTo>
+                  <a:pt x="3812591" y="80619"/>
+                </a:lnTo>
+                <a:lnTo>
+                  <a:pt x="3891155" y="119597"/>
+                </a:lnTo>
+                <a:lnTo>
+                  <a:pt x="3965802" y="165636"/>
+                </a:lnTo>
+                <a:lnTo>
+                  <a:pt x="4035897" y="218345"/>
+                </a:lnTo>
+                <a:lnTo>
+                  <a:pt x="4100847" y="277278"/>
+                </a:lnTo>
+                <a:lnTo>
+                  <a:pt x="4160102" y="341935"/>
+                </a:lnTo>
+                <a:lnTo>
+                  <a:pt x="4213158" y="411769"/>
+                </a:lnTo>
+                <a:lnTo>
+                  <a:pt x="4259566" y="486186"/>
+                </a:lnTo>
+                <a:lnTo>
+                  <a:pt x="4298933" y="564556"/>
+                </a:lnTo>
+                <a:lnTo>
+                  <a:pt x="4330924" y="646216"/>
+                </a:lnTo>
+                <a:lnTo>
+                  <a:pt x="4355269" y="730471"/>
+                </a:lnTo>
+                <a:lnTo>
+                  <a:pt x="4371761" y="816608"/>
+                </a:lnTo>
+                <a:lnTo>
+                  <a:pt x="4380261" y="903898"/>
+                </a:lnTo>
+                <a:lnTo>
+                  <a:pt x="4380695" y="991599"/>
+                </a:lnTo>
+                <a:lnTo>
+                  <a:pt x="4373062" y="1078968"/>
+                </a:lnTo>
+                <a:lnTo>
+                  <a:pt x="4357424" y="1165264"/>
+                </a:lnTo>
+                <a:lnTo>
+                  <a:pt x="4333916" y="1249757"/>
+                </a:lnTo>
+                <a:lnTo>
+                  <a:pt x="4302735" y="1331729"/>
+                </a:lnTo>
+                <a:lnTo>
+                  <a:pt x="4264148" y="1410486"/>
+                </a:lnTo>
+                <a:lnTo>
+                  <a:pt x="4218480" y="1485360"/>
+                </a:lnTo>
+                <a:lnTo>
+                  <a:pt x="4166118" y="1555716"/>
+                </a:lnTo>
+                <a:lnTo>
+                  <a:pt x="4166118" y="1555716"/>
+                </a:lnTo>
+                <a:lnTo>
+                  <a:pt x="4158683" y="1564147"/>
+                </a:lnTo>
+                <a:lnTo>
+                  <a:pt x="4150646" y="1572007"/>
+                </a:lnTo>
+                <a:lnTo>
+                  <a:pt x="4142053" y="1579254"/>
+                </a:lnTo>
+                <a:lnTo>
+                  <a:pt x="4132948" y="1585848"/>
+                </a:lnTo>
+                <a:lnTo>
+                  <a:pt x="4123383" y="1591754"/>
+                </a:lnTo>
+                <a:lnTo>
+                  <a:pt x="4113409" y="1596938"/>
+                </a:lnTo>
+                <a:lnTo>
+                  <a:pt x="4103079" y="1601374"/>
+                </a:lnTo>
+                <a:lnTo>
+                  <a:pt x="4092451" y="1605036"/>
+                </a:lnTo>
+                <a:lnTo>
+                  <a:pt x="4081582" y="1607905"/>
+                </a:lnTo>
+                <a:lnTo>
+                  <a:pt x="4070531" y="1609966"/>
+                </a:lnTo>
+                <a:lnTo>
+                  <a:pt x="4059358" y="1611207"/>
+                </a:lnTo>
+                <a:lnTo>
+                  <a:pt x="4048125" y="1611622"/>
+                </a:lnTo>
+                <a:lnTo>
+                  <a:pt x="4036891" y="1611207"/>
+                </a:lnTo>
+                <a:lnTo>
+                  <a:pt x="4025718" y="1609966"/>
+                </a:lnTo>
+                <a:lnTo>
+                  <a:pt x="4014667" y="1607905"/>
+                </a:lnTo>
+                <a:lnTo>
+                  <a:pt x="4003798" y="1605036"/>
+                </a:lnTo>
+                <a:lnTo>
+                  <a:pt x="3993170" y="1601374"/>
+                </a:lnTo>
+                <a:lnTo>
+                  <a:pt x="3982840" y="1596938"/>
+                </a:lnTo>
+                <a:lnTo>
+                  <a:pt x="3972866" y="1591754"/>
+                </a:lnTo>
+                <a:lnTo>
+                  <a:pt x="3963301" y="1585848"/>
+                </a:lnTo>
+                <a:lnTo>
+                  <a:pt x="3954196" y="1579254"/>
+                </a:lnTo>
+                <a:lnTo>
+                  <a:pt x="3945603" y="1572007"/>
+                </a:lnTo>
+                <a:lnTo>
+                  <a:pt x="3937566" y="1564147"/>
+                </a:lnTo>
+                <a:lnTo>
+                  <a:pt x="3930131" y="1555716"/>
+                </a:lnTo>
+                <a:lnTo>
+                  <a:pt x="3930131" y="1555716"/>
+                </a:lnTo>
+                <a:lnTo>
+                  <a:pt x="3877769" y="1485360"/>
+                </a:lnTo>
+                <a:lnTo>
+                  <a:pt x="3832101" y="1410486"/>
+                </a:lnTo>
+                <a:lnTo>
+                  <a:pt x="3793514" y="1331729"/>
+                </a:lnTo>
+                <a:lnTo>
+                  <a:pt x="3762333" y="1249757"/>
+                </a:lnTo>
+                <a:lnTo>
+                  <a:pt x="3738825" y="1165264"/>
+                </a:lnTo>
+                <a:lnTo>
+                  <a:pt x="3723187" y="1078968"/>
+                </a:lnTo>
+                <a:lnTo>
+                  <a:pt x="3715554" y="991599"/>
+                </a:lnTo>
+                <a:lnTo>
+                  <a:pt x="3715988" y="903898"/>
+                </a:lnTo>
+                <a:lnTo>
+                  <a:pt x="3724488" y="816608"/>
+                </a:lnTo>
+                <a:lnTo>
+                  <a:pt x="3740980" y="730471"/>
+                </a:lnTo>
+                <a:lnTo>
+                  <a:pt x="3765325" y="646216"/>
+                </a:lnTo>
+                <a:lnTo>
+                  <a:pt x="3797316" y="564556"/>
+                </a:lnTo>
+                <a:lnTo>
+                  <a:pt x="3836683" y="486186"/>
+                </a:lnTo>
+                <a:lnTo>
+                  <a:pt x="3883091" y="411769"/>
+                </a:lnTo>
+                <a:lnTo>
+                  <a:pt x="3936147" y="341935"/>
+                </a:lnTo>
+                <a:lnTo>
+                  <a:pt x="3995402" y="277278"/>
+                </a:lnTo>
+                <a:lnTo>
+                  <a:pt x="4060352" y="218345"/>
+                </a:lnTo>
+                <a:lnTo>
+                  <a:pt x="4130447" y="165636"/>
+                </a:lnTo>
+                <a:lnTo>
+                  <a:pt x="4205094" y="119597"/>
+                </a:lnTo>
+                <a:lnTo>
+                  <a:pt x="4283658" y="80619"/>
+                </a:lnTo>
+                <a:lnTo>
+                  <a:pt x="4365475" y="49033"/>
+                </a:lnTo>
+                <a:lnTo>
+                  <a:pt x="4449850" y="25106"/>
+                </a:lnTo>
+                <a:lnTo>
+                  <a:pt x="4536068" y="9041"/>
+                </a:lnTo>
+                <a:lnTo>
+                  <a:pt x="4623398" y="974"/>
+                </a:lnTo>
+                <a:lnTo>
+                  <a:pt x="4711101" y="974"/>
+                </a:lnTo>
+                <a:lnTo>
+                  <a:pt x="4798431" y="9041"/>
+                </a:lnTo>
+                <a:lnTo>
+                  <a:pt x="4884649" y="25106"/>
+                </a:lnTo>
+                <a:lnTo>
+                  <a:pt x="4969024" y="49033"/>
+                </a:lnTo>
+                <a:lnTo>
+                  <a:pt x="5050841" y="80619"/>
+                </a:lnTo>
+                <a:lnTo>
+                  <a:pt x="5129405" y="119597"/>
+                </a:lnTo>
+                <a:lnTo>
+                  <a:pt x="5204052" y="165636"/>
+                </a:lnTo>
+                <a:lnTo>
+                  <a:pt x="5274147" y="218345"/>
+                </a:lnTo>
+                <a:lnTo>
+                  <a:pt x="5339097" y="277278"/>
+                </a:lnTo>
+                <a:lnTo>
+                  <a:pt x="5398352" y="341935"/>
+                </a:lnTo>
+                <a:lnTo>
+                  <a:pt x="5451408" y="411769"/>
+                </a:lnTo>
+                <a:lnTo>
+                  <a:pt x="5497816" y="486186"/>
+                </a:lnTo>
+                <a:lnTo>
+                  <a:pt x="5537183" y="564556"/>
+                </a:lnTo>
+                <a:lnTo>
+                  <a:pt x="5569174" y="646216"/>
+                </a:lnTo>
+                <a:lnTo>
+                  <a:pt x="5593519" y="730471"/>
+                </a:lnTo>
+                <a:lnTo>
+                  <a:pt x="5610011" y="816608"/>
+                </a:lnTo>
+                <a:lnTo>
+                  <a:pt x="5618511" y="903898"/>
+                </a:lnTo>
+                <a:lnTo>
+                  <a:pt x="5618945" y="991599"/>
+                </a:lnTo>
+                <a:lnTo>
+                  <a:pt x="5611312" y="1078968"/>
+                </a:lnTo>
+                <a:lnTo>
+                  <a:pt x="5595674" y="1165264"/>
+                </a:lnTo>
+                <a:lnTo>
+                  <a:pt x="5572166" y="1249757"/>
+                </a:lnTo>
+                <a:lnTo>
+                  <a:pt x="5540985" y="1331729"/>
+                </a:lnTo>
+                <a:lnTo>
+                  <a:pt x="5502398" y="1410486"/>
+                </a:lnTo>
+                <a:lnTo>
+                  <a:pt x="5456730" y="1485360"/>
+                </a:lnTo>
+                <a:lnTo>
+                  <a:pt x="5404368" y="1555716"/>
+                </a:lnTo>
+                <a:lnTo>
+                  <a:pt x="5404368" y="1555716"/>
+                </a:lnTo>
+                <a:lnTo>
+                  <a:pt x="5396933" y="1564147"/>
+                </a:lnTo>
+                <a:lnTo>
+                  <a:pt x="5388896" y="1572007"/>
+                </a:lnTo>
+                <a:lnTo>
+                  <a:pt x="5380303" y="1579254"/>
+                </a:lnTo>
+                <a:lnTo>
+                  <a:pt x="5371198" y="1585848"/>
+                </a:lnTo>
+                <a:lnTo>
+                  <a:pt x="5361633" y="1591754"/>
+                </a:lnTo>
+                <a:lnTo>
+                  <a:pt x="5351659" y="1596938"/>
+                </a:lnTo>
+                <a:lnTo>
+                  <a:pt x="5341329" y="1601374"/>
+                </a:lnTo>
+                <a:lnTo>
+                  <a:pt x="5330701" y="1605036"/>
+                </a:lnTo>
+                <a:lnTo>
+                  <a:pt x="5319832" y="1607905"/>
+                </a:lnTo>
+                <a:lnTo>
+                  <a:pt x="5308781" y="1609966"/>
+                </a:lnTo>
+                <a:lnTo>
+                  <a:pt x="5297608" y="1611207"/>
+                </a:lnTo>
+                <a:lnTo>
+                  <a:pt x="5286375" y="1611622"/>
+                </a:lnTo>
+                <a:lnTo>
+                  <a:pt x="5275141" y="1611207"/>
+                </a:lnTo>
+                <a:lnTo>
+                  <a:pt x="5263968" y="1609966"/>
+                </a:lnTo>
+                <a:lnTo>
+                  <a:pt x="5252917" y="1607905"/>
+                </a:lnTo>
+                <a:lnTo>
+                  <a:pt x="5242048" y="1605036"/>
+                </a:lnTo>
+                <a:lnTo>
+                  <a:pt x="5231420" y="1601374"/>
+                </a:lnTo>
+                <a:lnTo>
+                  <a:pt x="5221090" y="1596938"/>
+                </a:lnTo>
+                <a:lnTo>
+                  <a:pt x="5211116" y="1591754"/>
+                </a:lnTo>
+                <a:lnTo>
+                  <a:pt x="5201551" y="1585848"/>
+                </a:lnTo>
+                <a:lnTo>
+                  <a:pt x="5192446" y="1579254"/>
+                </a:lnTo>
+                <a:lnTo>
+                  <a:pt x="5183853" y="1572007"/>
+                </a:lnTo>
+                <a:lnTo>
+                  <a:pt x="5175816" y="1564147"/>
+                </a:lnTo>
+                <a:lnTo>
+                  <a:pt x="5168381" y="1555716"/>
+                </a:lnTo>
+                <a:lnTo>
+                  <a:pt x="5168381" y="1555716"/>
+                </a:lnTo>
+                <a:lnTo>
+                  <a:pt x="5123555" y="1496358"/>
+                </a:lnTo>
+                <a:lnTo>
+                  <a:pt x="5083499" y="1433683"/>
+                </a:lnTo>
+                <a:lnTo>
+                  <a:pt x="5048455" y="1368073"/>
+                </a:lnTo>
+                <a:lnTo>
+                  <a:pt x="5018637" y="1299929"/>
+                </a:lnTo>
+                <a:lnTo>
+                  <a:pt x="4994228" y="1229666"/>
+                </a:lnTo>
+                <a:lnTo>
+                  <a:pt x="4975376" y="1157713"/>
+                </a:lnTo>
+                <a:lnTo>
+                  <a:pt x="4962196" y="1084508"/>
+                </a:lnTo>
+                <a:lnTo>
+                  <a:pt x="4954769" y="1010498"/>
+                </a:lnTo>
+                <a:lnTo>
+                  <a:pt x="4953140" y="936134"/>
+                </a:lnTo>
+                <a:lnTo>
+                  <a:pt x="4957318" y="861869"/>
+                </a:lnTo>
+                <a:lnTo>
+                  <a:pt x="4967278" y="788157"/>
+                </a:lnTo>
+                <a:lnTo>
+                  <a:pt x="4982960" y="715447"/>
+                </a:lnTo>
+                <a:lnTo>
+                  <a:pt x="5004268" y="644182"/>
+                </a:lnTo>
+                <a:lnTo>
+                  <a:pt x="5031072" y="574798"/>
+                </a:lnTo>
+                <a:lnTo>
+                  <a:pt x="5063208" y="507716"/>
+                </a:lnTo>
+                <a:lnTo>
+                  <a:pt x="5100481" y="443347"/>
+                </a:lnTo>
+                <a:lnTo>
+                  <a:pt x="5142663" y="382082"/>
+                </a:lnTo>
+                <a:lnTo>
+                  <a:pt x="5189497" y="324296"/>
+                </a:lnTo>
+                <a:lnTo>
+                  <a:pt x="5240697" y="270340"/>
+                </a:lnTo>
+                <a:lnTo>
+                  <a:pt x="5295951" y="220544"/>
+                </a:lnTo>
+                <a:lnTo>
+                  <a:pt x="5354923" y="175212"/>
+                </a:lnTo>
+                <a:lnTo>
+                  <a:pt x="5417252" y="134619"/>
+                </a:lnTo>
+                <a:lnTo>
+                  <a:pt x="5482559" y="99014"/>
+                </a:lnTo>
+                <a:lnTo>
+                  <a:pt x="5550444" y="68614"/>
+                </a:lnTo>
+                <a:lnTo>
+                  <a:pt x="5620496" y="43603"/>
+                </a:lnTo>
+                <a:lnTo>
+                  <a:pt x="5692285" y="24135"/>
+                </a:lnTo>
+                <a:lnTo>
+                  <a:pt x="5765374" y="10328"/>
+                </a:lnTo>
+                <a:lnTo>
+                  <a:pt x="5839318" y="2267"/>
+                </a:lnTo>
+                <a:lnTo>
+                  <a:pt x="5913665" y="0"/>
+                </a:lnTo>
+                <a:lnTo>
+                  <a:pt x="5987963" y="3541"/>
+                </a:lnTo>
+                <a:lnTo>
+                  <a:pt x="6061758" y="12869"/>
+                </a:lnTo>
+                <a:lnTo>
+                  <a:pt x="6134599" y="27927"/>
+                </a:lnTo>
+                <a:lnTo>
+                  <a:pt x="6206044" y="48623"/>
+                </a:lnTo>
+                <a:lnTo>
+                  <a:pt x="6275656" y="74831"/>
+                </a:lnTo>
+                <a:lnTo>
+                  <a:pt x="6343011" y="106391"/>
+                </a:lnTo>
+                <a:lnTo>
+                  <a:pt x="6407697" y="143111"/>
+                </a:lnTo>
+                <a:lnTo>
+                  <a:pt x="6469321" y="184766"/>
+                </a:lnTo>
+                <a:lnTo>
+                  <a:pt x="6527507" y="231103"/>
+                </a:lnTo>
+                <a:lnTo>
+                  <a:pt x="6581900" y="281838"/>
+                </a:lnTo>
+                <a:lnTo>
+                  <a:pt x="6632167" y="336664"/>
+                </a:lnTo>
+                <a:lnTo>
+                  <a:pt x="6678004" y="395245"/>
+                </a:lnTo>
+                <a:lnTo>
+                  <a:pt x="6719129" y="457224"/>
+                </a:lnTo>
+                <a:lnTo>
+                  <a:pt x="6755293" y="522223"/>
+                </a:lnTo>
+                <a:lnTo>
+                  <a:pt x="6786274" y="589845"/>
+                </a:lnTo>
+                <a:lnTo>
+                  <a:pt x="6811884" y="659679"/>
+                </a:lnTo>
+                <a:lnTo>
+                  <a:pt x="6831967" y="731299"/>
+                </a:lnTo>
+                <a:lnTo>
+                  <a:pt x="6846400" y="804267"/>
+                </a:lnTo>
+                <a:lnTo>
+                  <a:pt x="6855095" y="878139"/>
+                </a:lnTo>
+                <a:lnTo>
+                  <a:pt x="6858000" y="952464"/>
                 </a:lnTo>
               </a:path>
             </a:pathLst>
           </a:custGeom>
           <a:noFill/>
-          <a:ln w="4572">
+          <a:ln w="9144">
             <a:solidFill>
               <a:srgbClr val="0000FF"/>
             </a:solidFill>
